--- a/docs/Diagrams/Diagrams.pptx
+++ b/docs/Diagrams/Diagrams.pptx
@@ -9011,7 +9011,7 @@
           <a:p>
             <a:fld id="{CB18BCE7-0017-4B0C-A2FB-E6F7885367AC}" type="datetimeFigureOut">
               <a:rPr lang="en-IE" smtClean="0"/>
-              <a:t>25/08/2026</a:t>
+              <a:t>23/09/2026</a:t>
             </a:fld>
             <a:endParaRPr lang="en-IE"/>
           </a:p>
@@ -9515,7 +9515,7 @@
           <a:p>
             <a:fld id="{79C0705B-4870-4470-A32F-307AEE1697AB}" type="datetimeFigureOut">
               <a:rPr lang="en-IE" smtClean="0"/>
-              <a:t>25/08/2026</a:t>
+              <a:t>23/09/2026</a:t>
             </a:fld>
             <a:endParaRPr lang="en-IE"/>
           </a:p>
@@ -9685,7 +9685,7 @@
           <a:p>
             <a:fld id="{79C0705B-4870-4470-A32F-307AEE1697AB}" type="datetimeFigureOut">
               <a:rPr lang="en-IE" smtClean="0"/>
-              <a:t>25/08/2026</a:t>
+              <a:t>23/09/2026</a:t>
             </a:fld>
             <a:endParaRPr lang="en-IE"/>
           </a:p>
@@ -9865,7 +9865,7 @@
           <a:p>
             <a:fld id="{79C0705B-4870-4470-A32F-307AEE1697AB}" type="datetimeFigureOut">
               <a:rPr lang="en-IE" smtClean="0"/>
-              <a:t>25/08/2026</a:t>
+              <a:t>23/09/2026</a:t>
             </a:fld>
             <a:endParaRPr lang="en-IE"/>
           </a:p>
@@ -10035,7 +10035,7 @@
           <a:p>
             <a:fld id="{79C0705B-4870-4470-A32F-307AEE1697AB}" type="datetimeFigureOut">
               <a:rPr lang="en-IE" smtClean="0"/>
-              <a:t>25/08/2026</a:t>
+              <a:t>23/09/2026</a:t>
             </a:fld>
             <a:endParaRPr lang="en-IE"/>
           </a:p>
@@ -10281,7 +10281,7 @@
           <a:p>
             <a:fld id="{79C0705B-4870-4470-A32F-307AEE1697AB}" type="datetimeFigureOut">
               <a:rPr lang="en-IE" smtClean="0"/>
-              <a:t>25/08/2026</a:t>
+              <a:t>23/09/2026</a:t>
             </a:fld>
             <a:endParaRPr lang="en-IE"/>
           </a:p>
@@ -10513,7 +10513,7 @@
           <a:p>
             <a:fld id="{79C0705B-4870-4470-A32F-307AEE1697AB}" type="datetimeFigureOut">
               <a:rPr lang="en-IE" smtClean="0"/>
-              <a:t>25/08/2026</a:t>
+              <a:t>23/09/2026</a:t>
             </a:fld>
             <a:endParaRPr lang="en-IE"/>
           </a:p>
@@ -10880,7 +10880,7 @@
           <a:p>
             <a:fld id="{79C0705B-4870-4470-A32F-307AEE1697AB}" type="datetimeFigureOut">
               <a:rPr lang="en-IE" smtClean="0"/>
-              <a:t>25/08/2026</a:t>
+              <a:t>23/09/2026</a:t>
             </a:fld>
             <a:endParaRPr lang="en-IE"/>
           </a:p>
@@ -10998,7 +10998,7 @@
           <a:p>
             <a:fld id="{79C0705B-4870-4470-A32F-307AEE1697AB}" type="datetimeFigureOut">
               <a:rPr lang="en-IE" smtClean="0"/>
-              <a:t>25/08/2026</a:t>
+              <a:t>23/09/2026</a:t>
             </a:fld>
             <a:endParaRPr lang="en-IE"/>
           </a:p>
@@ -11093,7 +11093,7 @@
           <a:p>
             <a:fld id="{79C0705B-4870-4470-A32F-307AEE1697AB}" type="datetimeFigureOut">
               <a:rPr lang="en-IE" smtClean="0"/>
-              <a:t>25/08/2026</a:t>
+              <a:t>23/09/2026</a:t>
             </a:fld>
             <a:endParaRPr lang="en-IE"/>
           </a:p>
@@ -11370,7 +11370,7 @@
           <a:p>
             <a:fld id="{79C0705B-4870-4470-A32F-307AEE1697AB}" type="datetimeFigureOut">
               <a:rPr lang="en-IE" smtClean="0"/>
-              <a:t>25/08/2026</a:t>
+              <a:t>23/09/2026</a:t>
             </a:fld>
             <a:endParaRPr lang="en-IE"/>
           </a:p>
@@ -11627,7 +11627,7 @@
           <a:p>
             <a:fld id="{79C0705B-4870-4470-A32F-307AEE1697AB}" type="datetimeFigureOut">
               <a:rPr lang="en-IE" smtClean="0"/>
-              <a:t>25/08/2026</a:t>
+              <a:t>23/09/2026</a:t>
             </a:fld>
             <a:endParaRPr lang="en-IE"/>
           </a:p>
@@ -11840,7 +11840,7 @@
           <a:p>
             <a:fld id="{79C0705B-4870-4470-A32F-307AEE1697AB}" type="datetimeFigureOut">
               <a:rPr lang="en-IE" smtClean="0"/>
-              <a:t>25/08/2026</a:t>
+              <a:t>23/09/2026</a:t>
             </a:fld>
             <a:endParaRPr lang="en-IE"/>
           </a:p>
@@ -22544,14 +22544,14 @@
           <p:nvPr>
             <p:extLst>
               <p:ext uri="{D42A27DB-BD31-4B8C-83A1-F6EECF244321}">
-                <p14:modId xmlns:p14="http://schemas.microsoft.com/office/powerpoint/2010/main" val="3452222421"/>
+                <p14:modId xmlns:p14="http://schemas.microsoft.com/office/powerpoint/2010/main" val="1705359239"/>
               </p:ext>
             </p:extLst>
           </p:nvPr>
         </p:nvGraphicFramePr>
         <p:xfrm>
           <a:off x="1626833" y="4212383"/>
-          <a:ext cx="29744120" cy="12538875"/>
+          <a:ext cx="29744120" cy="14077802"/>
         </p:xfrm>
         <a:graphic>
           <a:graphicData uri="http://schemas.openxmlformats.org/drawingml/2006/table">
@@ -22945,7 +22945,7 @@
                       <a:pPr lvl="0" algn="ctr"/>
                       <a:r>
                         <a:rPr lang="en-IE" sz="5800" dirty="0"/>
-                        <a:t>tasktide.org/use-cases</a:t>
+                        <a:t>use-cases.tasktide.org</a:t>
                       </a:r>
                     </a:p>
                   </a:txBody>
@@ -23100,6 +23100,115 @@
                 <a:extLst>
                   <a:ext uri="{0D108BD9-81ED-4DB2-BD59-A6C34878D82A}">
                     <a16:rowId xmlns:a16="http://schemas.microsoft.com/office/drawing/2014/main" val="370735797"/>
+                  </a:ext>
+                </a:extLst>
+              </a:tr>
+              <a:tr h="1538927">
+                <a:tc>
+                  <a:txBody>
+                    <a:bodyPr/>
+                    <a:lstStyle/>
+                    <a:p>
+                      <a:pPr algn="ctr"/>
+                      <a:r>
+                        <a:rPr lang="en-IE" sz="6600" b="1" dirty="0"/>
+                        <a:t>Docker Image</a:t>
+                      </a:r>
+                    </a:p>
+                  </a:txBody>
+                  <a:tcPr anchor="ctr">
+                    <a:lnL w="76200" cap="flat" cmpd="sng" algn="ctr">
+                      <a:solidFill>
+                        <a:schemeClr val="tx1"/>
+                      </a:solidFill>
+                      <a:prstDash val="solid"/>
+                      <a:round/>
+                      <a:headEnd type="none" w="med" len="med"/>
+                      <a:tailEnd type="none" w="med" len="med"/>
+                    </a:lnL>
+                    <a:lnR w="76200" cap="flat" cmpd="sng" algn="ctr">
+                      <a:solidFill>
+                        <a:schemeClr val="tx1"/>
+                      </a:solidFill>
+                      <a:prstDash val="solid"/>
+                      <a:round/>
+                      <a:headEnd type="none" w="med" len="med"/>
+                      <a:tailEnd type="none" w="med" len="med"/>
+                    </a:lnR>
+                    <a:lnT w="76200" cap="flat" cmpd="sng" algn="ctr">
+                      <a:solidFill>
+                        <a:schemeClr val="tx1"/>
+                      </a:solidFill>
+                      <a:prstDash val="solid"/>
+                      <a:round/>
+                      <a:headEnd type="none" w="med" len="med"/>
+                      <a:tailEnd type="none" w="med" len="med"/>
+                    </a:lnT>
+                    <a:lnB w="76200" cap="flat" cmpd="sng" algn="ctr">
+                      <a:solidFill>
+                        <a:schemeClr val="tx1"/>
+                      </a:solidFill>
+                      <a:prstDash val="solid"/>
+                      <a:round/>
+                      <a:headEnd type="none" w="med" len="med"/>
+                      <a:tailEnd type="none" w="med" len="med"/>
+                    </a:lnB>
+                  </a:tcPr>
+                </a:tc>
+                <a:tc>
+                  <a:txBody>
+                    <a:bodyPr/>
+                    <a:lstStyle/>
+                    <a:p>
+                      <a:pPr lvl="0" algn="ctr"/>
+                      <a:r>
+                        <a:rPr lang="en-IE" sz="5800" dirty="0"/>
+                        <a:t>docker.tasktide.org</a:t>
+                      </a:r>
+                    </a:p>
+                  </a:txBody>
+                  <a:tcPr anchor="ctr">
+                    <a:lnL w="76200" cap="flat" cmpd="sng" algn="ctr">
+                      <a:solidFill>
+                        <a:schemeClr val="tx1"/>
+                      </a:solidFill>
+                      <a:prstDash val="solid"/>
+                      <a:round/>
+                      <a:headEnd type="none" w="med" len="med"/>
+                      <a:tailEnd type="none" w="med" len="med"/>
+                    </a:lnL>
+                    <a:lnR w="76200" cap="flat" cmpd="sng" algn="ctr">
+                      <a:solidFill>
+                        <a:schemeClr val="tx1"/>
+                      </a:solidFill>
+                      <a:prstDash val="solid"/>
+                      <a:round/>
+                      <a:headEnd type="none" w="med" len="med"/>
+                      <a:tailEnd type="none" w="med" len="med"/>
+                    </a:lnR>
+                    <a:lnT w="76200" cap="flat" cmpd="sng" algn="ctr">
+                      <a:solidFill>
+                        <a:schemeClr val="tx1"/>
+                      </a:solidFill>
+                      <a:prstDash val="solid"/>
+                      <a:round/>
+                      <a:headEnd type="none" w="med" len="med"/>
+                      <a:tailEnd type="none" w="med" len="med"/>
+                    </a:lnT>
+                    <a:lnB w="76200" cap="flat" cmpd="sng" algn="ctr">
+                      <a:solidFill>
+                        <a:schemeClr val="tx1"/>
+                      </a:solidFill>
+                      <a:prstDash val="solid"/>
+                      <a:round/>
+                      <a:headEnd type="none" w="med" len="med"/>
+                      <a:tailEnd type="none" w="med" len="med"/>
+                    </a:lnB>
+                  </a:tcPr>
+                </a:tc>
+                <a:extLst>
+                  <a:ext uri="{0D108BD9-81ED-4DB2-BD59-A6C34878D82A}">
+                    <a16:rowId xmlns:a16="http://schemas.microsoft.com/office/drawing/2014/main" val="255513370"/>
                   </a:ext>
                 </a:extLst>
               </a:tr>

--- a/docs/Diagrams/Diagrams.pptx
+++ b/docs/Diagrams/Diagrams.pptx
@@ -9011,7 +9011,7 @@
           <a:p>
             <a:fld id="{CB18BCE7-0017-4B0C-A2FB-E6F7885367AC}" type="datetimeFigureOut">
               <a:rPr lang="en-IE" smtClean="0"/>
-              <a:t>23/09/2026</a:t>
+              <a:t>07/10/2026</a:t>
             </a:fld>
             <a:endParaRPr lang="en-IE"/>
           </a:p>
@@ -9515,7 +9515,7 @@
           <a:p>
             <a:fld id="{79C0705B-4870-4470-A32F-307AEE1697AB}" type="datetimeFigureOut">
               <a:rPr lang="en-IE" smtClean="0"/>
-              <a:t>23/09/2026</a:t>
+              <a:t>07/10/2026</a:t>
             </a:fld>
             <a:endParaRPr lang="en-IE"/>
           </a:p>
@@ -9685,7 +9685,7 @@
           <a:p>
             <a:fld id="{79C0705B-4870-4470-A32F-307AEE1697AB}" type="datetimeFigureOut">
               <a:rPr lang="en-IE" smtClean="0"/>
-              <a:t>23/09/2026</a:t>
+              <a:t>07/10/2026</a:t>
             </a:fld>
             <a:endParaRPr lang="en-IE"/>
           </a:p>
@@ -9865,7 +9865,7 @@
           <a:p>
             <a:fld id="{79C0705B-4870-4470-A32F-307AEE1697AB}" type="datetimeFigureOut">
               <a:rPr lang="en-IE" smtClean="0"/>
-              <a:t>23/09/2026</a:t>
+              <a:t>07/10/2026</a:t>
             </a:fld>
             <a:endParaRPr lang="en-IE"/>
           </a:p>
@@ -10035,7 +10035,7 @@
           <a:p>
             <a:fld id="{79C0705B-4870-4470-A32F-307AEE1697AB}" type="datetimeFigureOut">
               <a:rPr lang="en-IE" smtClean="0"/>
-              <a:t>23/09/2026</a:t>
+              <a:t>07/10/2026</a:t>
             </a:fld>
             <a:endParaRPr lang="en-IE"/>
           </a:p>
@@ -10281,7 +10281,7 @@
           <a:p>
             <a:fld id="{79C0705B-4870-4470-A32F-307AEE1697AB}" type="datetimeFigureOut">
               <a:rPr lang="en-IE" smtClean="0"/>
-              <a:t>23/09/2026</a:t>
+              <a:t>07/10/2026</a:t>
             </a:fld>
             <a:endParaRPr lang="en-IE"/>
           </a:p>
@@ -10513,7 +10513,7 @@
           <a:p>
             <a:fld id="{79C0705B-4870-4470-A32F-307AEE1697AB}" type="datetimeFigureOut">
               <a:rPr lang="en-IE" smtClean="0"/>
-              <a:t>23/09/2026</a:t>
+              <a:t>07/10/2026</a:t>
             </a:fld>
             <a:endParaRPr lang="en-IE"/>
           </a:p>
@@ -10880,7 +10880,7 @@
           <a:p>
             <a:fld id="{79C0705B-4870-4470-A32F-307AEE1697AB}" type="datetimeFigureOut">
               <a:rPr lang="en-IE" smtClean="0"/>
-              <a:t>23/09/2026</a:t>
+              <a:t>07/10/2026</a:t>
             </a:fld>
             <a:endParaRPr lang="en-IE"/>
           </a:p>
@@ -10998,7 +10998,7 @@
           <a:p>
             <a:fld id="{79C0705B-4870-4470-A32F-307AEE1697AB}" type="datetimeFigureOut">
               <a:rPr lang="en-IE" smtClean="0"/>
-              <a:t>23/09/2026</a:t>
+              <a:t>07/10/2026</a:t>
             </a:fld>
             <a:endParaRPr lang="en-IE"/>
           </a:p>
@@ -11093,7 +11093,7 @@
           <a:p>
             <a:fld id="{79C0705B-4870-4470-A32F-307AEE1697AB}" type="datetimeFigureOut">
               <a:rPr lang="en-IE" smtClean="0"/>
-              <a:t>23/09/2026</a:t>
+              <a:t>07/10/2026</a:t>
             </a:fld>
             <a:endParaRPr lang="en-IE"/>
           </a:p>
@@ -11370,7 +11370,7 @@
           <a:p>
             <a:fld id="{79C0705B-4870-4470-A32F-307AEE1697AB}" type="datetimeFigureOut">
               <a:rPr lang="en-IE" smtClean="0"/>
-              <a:t>23/09/2026</a:t>
+              <a:t>07/10/2026</a:t>
             </a:fld>
             <a:endParaRPr lang="en-IE"/>
           </a:p>
@@ -11627,7 +11627,7 @@
           <a:p>
             <a:fld id="{79C0705B-4870-4470-A32F-307AEE1697AB}" type="datetimeFigureOut">
               <a:rPr lang="en-IE" smtClean="0"/>
-              <a:t>23/09/2026</a:t>
+              <a:t>07/10/2026</a:t>
             </a:fld>
             <a:endParaRPr lang="en-IE"/>
           </a:p>
@@ -11840,7 +11840,7 @@
           <a:p>
             <a:fld id="{79C0705B-4870-4470-A32F-307AEE1697AB}" type="datetimeFigureOut">
               <a:rPr lang="en-IE" smtClean="0"/>
-              <a:t>23/09/2026</a:t>
+              <a:t>07/10/2026</a:t>
             </a:fld>
             <a:endParaRPr lang="en-IE"/>
           </a:p>
@@ -22544,7 +22544,7 @@
           <p:nvPr>
             <p:extLst>
               <p:ext uri="{D42A27DB-BD31-4B8C-83A1-F6EECF244321}">
-                <p14:modId xmlns:p14="http://schemas.microsoft.com/office/powerpoint/2010/main" val="1705359239"/>
+                <p14:modId xmlns:p14="http://schemas.microsoft.com/office/powerpoint/2010/main" val="838354433"/>
               </p:ext>
             </p:extLst>
           </p:nvPr>
@@ -22893,9 +22893,10 @@
                     <a:p>
                       <a:pPr algn="ctr"/>
                       <a:r>
-                        <a:rPr lang="en-IE" sz="6600" b="1" dirty="0"/>
+                        <a:rPr lang="en-IE" sz="6600" b="1"/>
                         <a:t>Use Cases</a:t>
                       </a:r>
+                      <a:endParaRPr lang="en-IE" sz="6600" b="1" dirty="0"/>
                     </a:p>
                   </a:txBody>
                   <a:tcPr anchor="ctr">
